--- a/assets/pptx/catalog-61.pptx
+++ b/assets/pptx/catalog-61.pptx
@@ -3267,7 +3267,7 @@
                 <a:ea typeface="Ebrima"/>
                 <a:cs typeface="Ebrima"/>
               </a:rPr>
-              <a:t>ምህረቱ ነው እንዲህ የሚያዘምረኝ (2x)</a:t>
+              <a:t>ምህረቱ ነው እንዲህ የሚያዘምረኝ 2x</a:t>
             </a:r>
           </a:p>
         </p:txBody>
@@ -3352,7 +3352,7 @@
                 <a:ea typeface="Ebrima"/>
                 <a:cs typeface="Ebrima"/>
               </a:rPr>
-              <a:t>ምህረቱ ነው እንዲህ የሚያዘምረኝ (2x)</a:t>
+              <a:t>ምህረቱ ነው እንዲህ የሚያዘምረኝ 2x</a:t>
             </a:r>
           </a:p>
         </p:txBody>
@@ -3558,7 +3558,7 @@
                 <a:ea typeface="Ebrima"/>
                 <a:cs typeface="Ebrima"/>
               </a:rPr>
-              <a:t>ምህረቱ ነው እንዲህ የሚያዘምረኝ (2x)</a:t>
+              <a:t>ምህረቱ ነው እንዲህ የሚያዘምረኝ 2x</a:t>
             </a:r>
           </a:p>
         </p:txBody>
@@ -3800,7 +3800,7 @@
                 <a:ea typeface="Ebrima"/>
                 <a:cs typeface="Ebrima"/>
               </a:rPr>
-              <a:t>ምህረቱ ነው እንዲህ የሚያዘምረኝ (2x)</a:t>
+              <a:t>ምህረቱ ነው እንዲህ የሚያዘምረኝ 2x</a:t>
             </a:r>
           </a:p>
         </p:txBody>
@@ -4006,7 +4006,7 @@
                 <a:ea typeface="Ebrima"/>
                 <a:cs typeface="Ebrima"/>
               </a:rPr>
-              <a:t>ምህረቱ ነው እንዲህ የሚያዘምረኝ (2x)</a:t>
+              <a:t>ምህረቱ ነው እንዲህ የሚያዘምረኝ 2x</a:t>
             </a:r>
           </a:p>
         </p:txBody>
